--- a/outputs/ophthalmology-batch-20261011/strabismus/A4_color_editable.pptx
+++ b/outputs/ophthalmology-batch-20261011/strabismus/A4_color_editable.pptx
@@ -631,7 +631,7 @@
           <a:p/>
           <a:p>
             <a:r>
-              <a:t>strabismus-09 间歇外斜分型：基本型远近差&lt;10△；分开过强远&gt;近≥15△，遮盖一眼30～60 min仍大；集合不足近&gt;远≥15△；类似分开过强型遮盖后近角增大。</a:t>
+              <a:t>strabismus-09 间歇外斜分型：基本型远近差&lt;10△；分开过强型：远距斜视度较近距大，差值≥15△，遮盖一眼30～60 min仍大；集合不足型：近距斜视度较远距大，差值≥15△；类似分开过强型遮盖后近角增大。</a:t>
             </a:r>
           </a:p>
           <a:p>
@@ -4190,7 +4190,7 @@
       </p:sp>
       <p:sp>
         <p:nvSpPr>
-          <p:cNvPr id="7" name="病史、远近视力、儿童麻痹验光；眼位/运动及双眼视。先矫屈光、治弱视；急性内斜先排颅内病。"/>
+          <p:cNvPr id="7" name="病史、远近视力、儿童睫状肌麻痹验光；眼位/运动及双眼视。先矫屈光、治弱视；急性内斜先排颅内病。"/>
           <p:cNvSpPr txBox="1"/>
           <p:nvPr/>
         </p:nvSpPr>
@@ -4230,7 +4230,7 @@
                 <a:ea typeface="Microsoft YaHei"/>
                 <a:cs typeface="Microsoft YaHei"/>
               </a:rPr>
-              <a:t>病史、远近视力、儿童麻痹验光；眼位/运动及双眼视。先矫</a:t>
+              <a:t>病史、远近视力、儿童睫状肌麻痹验光；眼位/运动及双眼</a:t>
             </a:r>
           </a:p>
           <a:p>
@@ -4254,7 +4254,7 @@
                 <a:ea typeface="Microsoft YaHei"/>
                 <a:cs typeface="Microsoft YaHei"/>
               </a:rPr>
-              <a:t>屈光、治弱视；急性内斜先排颅内病。</a:t>
+              <a:t>视。先矫屈光、治弱视；急性内斜先排颅内病。</a:t>
             </a:r>
           </a:p>
         </p:txBody>
@@ -5262,7 +5262,7 @@
       </p:sp>
       <p:sp>
         <p:nvSpPr>
-          <p:cNvPr id="27" name="病史、远近视力、儿童麻痹验光；眼位/运动及双眼视。先矫屈光、治弱视；急性内斜先排颅内病。"/>
+          <p:cNvPr id="27" name="病史、远近视力、儿童睫状肌麻痹验光；眼位/运动及双眼视。先矫屈光、治弱视；急性内斜先排颅内病。"/>
           <p:cNvSpPr txBox="1"/>
           <p:nvPr/>
         </p:nvSpPr>
@@ -5302,7 +5302,7 @@
                 <a:ea typeface="Microsoft YaHei"/>
                 <a:cs typeface="Microsoft YaHei"/>
               </a:rPr>
-              <a:t>病史、远近视力、儿童麻痹验光；眼位/运动及双眼视。先矫</a:t>
+              <a:t>病史、远近视力、儿童睫状肌麻痹验光；眼位/运动及双眼</a:t>
             </a:r>
           </a:p>
           <a:p>
@@ -5326,7 +5326,7 @@
                 <a:ea typeface="Microsoft YaHei"/>
                 <a:cs typeface="Microsoft YaHei"/>
               </a:rPr>
-              <a:t>屈光、治弱视；急性内斜先排颅内病。</a:t>
+              <a:t>视。先矫屈光、治弱视；急性内斜先排颅内病。</a:t>
             </a:r>
           </a:p>
         </p:txBody>
@@ -6334,7 +6334,7 @@
       </p:sp>
       <p:sp>
         <p:nvSpPr>
-          <p:cNvPr id="47" name="病史、远近视力、儿童麻痹验光；眼位/运动及双眼视。先矫屈光、治弱视；急性内斜先排颅内病。"/>
+          <p:cNvPr id="47" name="病史、远近视力、儿童睫状肌麻痹验光；眼位/运动及双眼视。先矫屈光、治弱视；急性内斜先排颅内病。"/>
           <p:cNvSpPr txBox="1"/>
           <p:nvPr/>
         </p:nvSpPr>
@@ -6374,7 +6374,7 @@
                 <a:ea typeface="Microsoft YaHei"/>
                 <a:cs typeface="Microsoft YaHei"/>
               </a:rPr>
-              <a:t>病史、远近视力、儿童麻痹验光；眼位/运动及双眼视。先矫</a:t>
+              <a:t>病史、远近视力、儿童睫状肌麻痹验光；眼位/运动及双眼</a:t>
             </a:r>
           </a:p>
           <a:p>
@@ -6398,7 +6398,7 @@
                 <a:ea typeface="Microsoft YaHei"/>
                 <a:cs typeface="Microsoft YaHei"/>
               </a:rPr>
-              <a:t>屈光、治弱视；急性内斜先排颅内病。</a:t>
+              <a:t>视。先矫屈光、治弱视；急性内斜先排颅内病。</a:t>
             </a:r>
           </a:p>
         </p:txBody>
@@ -7406,7 +7406,7 @@
       </p:sp>
       <p:sp>
         <p:nvSpPr>
-          <p:cNvPr id="67" name="病史、远近视力、儿童麻痹验光；眼位/运动及双眼视。先矫屈光、治弱视；急性内斜先排颅内病。"/>
+          <p:cNvPr id="67" name="病史、远近视力、儿童睫状肌麻痹验光；眼位/运动及双眼视。先矫屈光、治弱视；急性内斜先排颅内病。"/>
           <p:cNvSpPr txBox="1"/>
           <p:nvPr/>
         </p:nvSpPr>
@@ -7446,7 +7446,7 @@
                 <a:ea typeface="Microsoft YaHei"/>
                 <a:cs typeface="Microsoft YaHei"/>
               </a:rPr>
-              <a:t>病史、远近视力、儿童麻痹验光；眼位/运动及双眼视。先矫</a:t>
+              <a:t>病史、远近视力、儿童睫状肌麻痹验光；眼位/运动及双眼</a:t>
             </a:r>
           </a:p>
           <a:p>
@@ -7470,7 +7470,7 @@
                 <a:ea typeface="Microsoft YaHei"/>
                 <a:cs typeface="Microsoft YaHei"/>
               </a:rPr>
-              <a:t>屈光、治弱视；急性内斜先排颅内病。</a:t>
+              <a:t>视。先矫屈光、治弱视；急性内斜先排颅内病。</a:t>
             </a:r>
           </a:p>
         </p:txBody>
@@ -9064,7 +9064,7 @@
       </p:sp>
       <p:sp>
         <p:nvSpPr>
-          <p:cNvPr id="15" name="术后1天、1周、1月、3月、6月；后每6～12月，至视觉发育成熟。调节性内斜5岁前每6月验光，之后每"/>
+          <p:cNvPr id="15" name="术后1天、1周、1月、3月、6月；后每6～12个月，至视觉发育成熟。调节性内斜5岁前每6月验光，之后"/>
           <p:cNvSpPr txBox="1"/>
           <p:nvPr/>
         </p:nvSpPr>
@@ -9104,7 +9104,7 @@
                 <a:ea typeface="Microsoft YaHei"/>
                 <a:cs typeface="Microsoft YaHei"/>
               </a:rPr>
-              <a:t>术后1天、1周、1月、3月、6月；后每6～12月，至视觉发育</a:t>
+              <a:t>术后1天、1周、1月、3月、6月；后每6～12个月，至视觉发</a:t>
             </a:r>
           </a:p>
           <a:p>
@@ -9128,7 +9128,7 @@
                 <a:ea typeface="Microsoft YaHei"/>
                 <a:cs typeface="Microsoft YaHei"/>
               </a:rPr>
-              <a:t>成熟。调节性内斜5岁前每6月验光，之后每年。</a:t>
+              <a:t>育成熟。调节性内斜5岁前每6月验光，之后每年。</a:t>
             </a:r>
           </a:p>
         </p:txBody>
@@ -10136,7 +10136,7 @@
       </p:sp>
       <p:sp>
         <p:nvSpPr>
-          <p:cNvPr id="35" name="术后1天、1周、1月、3月、6月；后每6～12月，至视觉发育成熟。调节性内斜5岁前每6月验光，之后每"/>
+          <p:cNvPr id="35" name="术后1天、1周、1月、3月、6月；后每6～12个月，至视觉发育成熟。调节性内斜5岁前每6月验光，之后"/>
           <p:cNvSpPr txBox="1"/>
           <p:nvPr/>
         </p:nvSpPr>
@@ -10176,7 +10176,7 @@
                 <a:ea typeface="Microsoft YaHei"/>
                 <a:cs typeface="Microsoft YaHei"/>
               </a:rPr>
-              <a:t>术后1天、1周、1月、3月、6月；后每6～12月，至视觉发育</a:t>
+              <a:t>术后1天、1周、1月、3月、6月；后每6～12个月，至视觉发</a:t>
             </a:r>
           </a:p>
           <a:p>
@@ -10200,7 +10200,7 @@
                 <a:ea typeface="Microsoft YaHei"/>
                 <a:cs typeface="Microsoft YaHei"/>
               </a:rPr>
-              <a:t>成熟。调节性内斜5岁前每6月验光，之后每年。</a:t>
+              <a:t>育成熟。调节性内斜5岁前每6月验光，之后每年。</a:t>
             </a:r>
           </a:p>
         </p:txBody>
@@ -11208,7 +11208,7 @@
       </p:sp>
       <p:sp>
         <p:nvSpPr>
-          <p:cNvPr id="55" name="术后1天、1周、1月、3月、6月；后每6～12月，至视觉发育成熟。调节性内斜5岁前每6月验光，之后每"/>
+          <p:cNvPr id="55" name="术后1天、1周、1月、3月、6月；后每6～12个月，至视觉发育成熟。调节性内斜5岁前每6月验光，之后"/>
           <p:cNvSpPr txBox="1"/>
           <p:nvPr/>
         </p:nvSpPr>
@@ -11248,7 +11248,7 @@
                 <a:ea typeface="Microsoft YaHei"/>
                 <a:cs typeface="Microsoft YaHei"/>
               </a:rPr>
-              <a:t>术后1天、1周、1月、3月、6月；后每6～12月，至视觉发育</a:t>
+              <a:t>术后1天、1周、1月、3月、6月；后每6～12个月，至视觉发</a:t>
             </a:r>
           </a:p>
           <a:p>
@@ -11272,7 +11272,7 @@
                 <a:ea typeface="Microsoft YaHei"/>
                 <a:cs typeface="Microsoft YaHei"/>
               </a:rPr>
-              <a:t>成熟。调节性内斜5岁前每6月验光，之后每年。</a:t>
+              <a:t>育成熟。调节性内斜5岁前每6月验光，之后每年。</a:t>
             </a:r>
           </a:p>
         </p:txBody>
@@ -12280,7 +12280,7 @@
       </p:sp>
       <p:sp>
         <p:nvSpPr>
-          <p:cNvPr id="75" name="术后1天、1周、1月、3月、6月；后每6～12月，至视觉发育成熟。调节性内斜5岁前每6月验光，之后每"/>
+          <p:cNvPr id="75" name="术后1天、1周、1月、3月、6月；后每6～12个月，至视觉发育成熟。调节性内斜5岁前每6月验光，之后"/>
           <p:cNvSpPr txBox="1"/>
           <p:nvPr/>
         </p:nvSpPr>
@@ -12320,7 +12320,7 @@
                 <a:ea typeface="Microsoft YaHei"/>
                 <a:cs typeface="Microsoft YaHei"/>
               </a:rPr>
-              <a:t>术后1天、1周、1月、3月、6月；后每6～12月，至视觉发育</a:t>
+              <a:t>术后1天、1周、1月、3月、6月；后每6～12个月，至视觉发</a:t>
             </a:r>
           </a:p>
           <a:p>
@@ -12344,7 +12344,7 @@
                 <a:ea typeface="Microsoft YaHei"/>
                 <a:cs typeface="Microsoft YaHei"/>
               </a:rPr>
-              <a:t>成熟。调节性内斜5岁前每6月验光，之后每年。</a:t>
+              <a:t>育成熟。调节性内斜5岁前每6月验光，之后每年。</a:t>
             </a:r>
           </a:p>
         </p:txBody>
